--- a/public/videos/repositories/domain-safety-checker/domain-safety-checker-tech-preview.pptx
+++ b/public/videos/repositories/domain-safety-checker/domain-safety-checker-tech-preview.pptx
@@ -134,7 +134,7 @@
           <p:cNvPr id="2" name="タイトル 1">
             <a:extLst>
               <a:ext uri="{FF2B5EF4-FFF2-40B4-BE49-F238E27FC236}">
-                <a16:creationId xmlns:a16="http://schemas.microsoft.com/office/drawing/2014/main" id="{A534749C-50FC-A7C4-FF79-0FBB23676C97}"/>
+                <a16:creationId xmlns:a16="http://schemas.microsoft.com/office/drawing/2014/main" id="{C01CEA25-6404-6FBB-7BBE-99F36FC86E91}"/>
               </a:ext>
             </a:extLst>
           </p:cNvPr>
@@ -171,7 +171,7 @@
           <p:cNvPr id="3" name="字幕 2">
             <a:extLst>
               <a:ext uri="{FF2B5EF4-FFF2-40B4-BE49-F238E27FC236}">
-                <a16:creationId xmlns:a16="http://schemas.microsoft.com/office/drawing/2014/main" id="{1F62A670-9696-A0E4-D12E-350D3D67843D}"/>
+                <a16:creationId xmlns:a16="http://schemas.microsoft.com/office/drawing/2014/main" id="{28B2EC5D-943C-88FA-FB21-487ACFE8BA96}"/>
               </a:ext>
             </a:extLst>
           </p:cNvPr>
@@ -241,7 +241,7 @@
           <p:cNvPr id="4" name="日付プレースホルダー 3">
             <a:extLst>
               <a:ext uri="{FF2B5EF4-FFF2-40B4-BE49-F238E27FC236}">
-                <a16:creationId xmlns:a16="http://schemas.microsoft.com/office/drawing/2014/main" id="{8E4263B6-A001-40C7-9846-077DC492CFFE}"/>
+                <a16:creationId xmlns:a16="http://schemas.microsoft.com/office/drawing/2014/main" id="{475E91FA-E960-4CAD-1954-FCFA1CF10D13}"/>
               </a:ext>
             </a:extLst>
           </p:cNvPr>
@@ -257,7 +257,7 @@
           <a:bodyPr/>
           <a:lstStyle/>
           <a:p>
-            <a:fld id="{8F22A2FD-1F9D-4B18-B395-8A6D1E752C7F}" type="datetimeFigureOut">
+            <a:fld id="{C8794D4D-2B31-496F-804D-F0E0E38FC863}" type="datetimeFigureOut">
               <a:rPr kumimoji="1" lang="ja-JP" altLang="en-US" smtClean="0"/>
               <a:t>2026/7/30</a:t>
             </a:fld>
@@ -270,7 +270,7 @@
           <p:cNvPr id="5" name="フッター プレースホルダー 4">
             <a:extLst>
               <a:ext uri="{FF2B5EF4-FFF2-40B4-BE49-F238E27FC236}">
-                <a16:creationId xmlns:a16="http://schemas.microsoft.com/office/drawing/2014/main" id="{CF4ADB26-A12F-07F2-4D2A-516AE928BC7B}"/>
+                <a16:creationId xmlns:a16="http://schemas.microsoft.com/office/drawing/2014/main" id="{9BC3CABE-F9BB-FFB8-6C35-8DD8F1C914A0}"/>
               </a:ext>
             </a:extLst>
           </p:cNvPr>
@@ -295,7 +295,7 @@
           <p:cNvPr id="6" name="スライド番号プレースホルダー 5">
             <a:extLst>
               <a:ext uri="{FF2B5EF4-FFF2-40B4-BE49-F238E27FC236}">
-                <a16:creationId xmlns:a16="http://schemas.microsoft.com/office/drawing/2014/main" id="{156CB06C-55C9-F702-A964-6D2ACF734D63}"/>
+                <a16:creationId xmlns:a16="http://schemas.microsoft.com/office/drawing/2014/main" id="{335294A5-1BFF-B4AE-4E45-548FA2C8E0BB}"/>
               </a:ext>
             </a:extLst>
           </p:cNvPr>
@@ -311,7 +311,7 @@
           <a:bodyPr/>
           <a:lstStyle/>
           <a:p>
-            <a:fld id="{1049705E-E65F-4190-8574-29A797FECD3E}" type="slidenum">
+            <a:fld id="{9D8152CF-B58D-4629-8196-10461BEDFA97}" type="slidenum">
               <a:rPr kumimoji="1" lang="ja-JP" altLang="en-US" smtClean="0"/>
               <a:t>‹#›</a:t>
             </a:fld>
@@ -322,7 +322,7 @@
     </p:spTree>
     <p:extLst>
       <p:ext uri="{BB962C8B-B14F-4D97-AF65-F5344CB8AC3E}">
-        <p14:creationId xmlns:p14="http://schemas.microsoft.com/office/powerpoint/2010/main" val="2237691640"/>
+        <p14:creationId xmlns:p14="http://schemas.microsoft.com/office/powerpoint/2010/main" val="3649487797"/>
       </p:ext>
     </p:extLst>
   </p:cSld>
@@ -354,7 +354,7 @@
           <p:cNvPr id="2" name="タイトル 1">
             <a:extLst>
               <a:ext uri="{FF2B5EF4-FFF2-40B4-BE49-F238E27FC236}">
-                <a16:creationId xmlns:a16="http://schemas.microsoft.com/office/drawing/2014/main" id="{5625E966-BB60-3069-2370-C02F385259E1}"/>
+                <a16:creationId xmlns:a16="http://schemas.microsoft.com/office/drawing/2014/main" id="{3DB95AFB-CE09-178A-76DF-3A80D3E765FE}"/>
               </a:ext>
             </a:extLst>
           </p:cNvPr>
@@ -382,7 +382,7 @@
           <p:cNvPr id="3" name="縦書きテキスト プレースホルダー 2">
             <a:extLst>
               <a:ext uri="{FF2B5EF4-FFF2-40B4-BE49-F238E27FC236}">
-                <a16:creationId xmlns:a16="http://schemas.microsoft.com/office/drawing/2014/main" id="{DF940A40-057F-44F5-5F04-6ADD6E09ADAF}"/>
+                <a16:creationId xmlns:a16="http://schemas.microsoft.com/office/drawing/2014/main" id="{1214A531-7112-6F3A-0C64-DFD77B333A84}"/>
               </a:ext>
             </a:extLst>
           </p:cNvPr>
@@ -471,7 +471,7 @@
           <p:cNvPr id="4" name="日付プレースホルダー 3">
             <a:extLst>
               <a:ext uri="{FF2B5EF4-FFF2-40B4-BE49-F238E27FC236}">
-                <a16:creationId xmlns:a16="http://schemas.microsoft.com/office/drawing/2014/main" id="{71014940-B874-5FE9-77DD-C54ACBF1D01D}"/>
+                <a16:creationId xmlns:a16="http://schemas.microsoft.com/office/drawing/2014/main" id="{23B950D5-B4AE-7D09-92B3-CC9BBE104744}"/>
               </a:ext>
             </a:extLst>
           </p:cNvPr>
@@ -487,7 +487,7 @@
           <a:bodyPr/>
           <a:lstStyle/>
           <a:p>
-            <a:fld id="{8F22A2FD-1F9D-4B18-B395-8A6D1E752C7F}" type="datetimeFigureOut">
+            <a:fld id="{C8794D4D-2B31-496F-804D-F0E0E38FC863}" type="datetimeFigureOut">
               <a:rPr kumimoji="1" lang="ja-JP" altLang="en-US" smtClean="0"/>
               <a:t>2026/7/30</a:t>
             </a:fld>
@@ -500,7 +500,7 @@
           <p:cNvPr id="5" name="フッター プレースホルダー 4">
             <a:extLst>
               <a:ext uri="{FF2B5EF4-FFF2-40B4-BE49-F238E27FC236}">
-                <a16:creationId xmlns:a16="http://schemas.microsoft.com/office/drawing/2014/main" id="{076DE944-8C88-4114-89AB-91C245FC15F0}"/>
+                <a16:creationId xmlns:a16="http://schemas.microsoft.com/office/drawing/2014/main" id="{4FDC1C68-902C-56D0-6CFA-C4D6B03F7A94}"/>
               </a:ext>
             </a:extLst>
           </p:cNvPr>
@@ -525,7 +525,7 @@
           <p:cNvPr id="6" name="スライド番号プレースホルダー 5">
             <a:extLst>
               <a:ext uri="{FF2B5EF4-FFF2-40B4-BE49-F238E27FC236}">
-                <a16:creationId xmlns:a16="http://schemas.microsoft.com/office/drawing/2014/main" id="{6B308614-841E-0167-EA9F-FBA2E6E136B2}"/>
+                <a16:creationId xmlns:a16="http://schemas.microsoft.com/office/drawing/2014/main" id="{7995E84A-F828-AE37-0C3B-BC8C9CD7C20C}"/>
               </a:ext>
             </a:extLst>
           </p:cNvPr>
@@ -541,7 +541,7 @@
           <a:bodyPr/>
           <a:lstStyle/>
           <a:p>
-            <a:fld id="{1049705E-E65F-4190-8574-29A797FECD3E}" type="slidenum">
+            <a:fld id="{9D8152CF-B58D-4629-8196-10461BEDFA97}" type="slidenum">
               <a:rPr kumimoji="1" lang="ja-JP" altLang="en-US" smtClean="0"/>
               <a:t>‹#›</a:t>
             </a:fld>
@@ -552,7 +552,7 @@
     </p:spTree>
     <p:extLst>
       <p:ext uri="{BB962C8B-B14F-4D97-AF65-F5344CB8AC3E}">
-        <p14:creationId xmlns:p14="http://schemas.microsoft.com/office/powerpoint/2010/main" val="112105233"/>
+        <p14:creationId xmlns:p14="http://schemas.microsoft.com/office/powerpoint/2010/main" val="1234166199"/>
       </p:ext>
     </p:extLst>
   </p:cSld>
@@ -584,7 +584,7 @@
           <p:cNvPr id="2" name="縦書きタイトル 1">
             <a:extLst>
               <a:ext uri="{FF2B5EF4-FFF2-40B4-BE49-F238E27FC236}">
-                <a16:creationId xmlns:a16="http://schemas.microsoft.com/office/drawing/2014/main" id="{996C52BA-AD44-EFFE-775A-F3C92954749D}"/>
+                <a16:creationId xmlns:a16="http://schemas.microsoft.com/office/drawing/2014/main" id="{BE91E867-E8BC-9A64-53B3-3BF2F4BC2744}"/>
               </a:ext>
             </a:extLst>
           </p:cNvPr>
@@ -617,7 +617,7 @@
           <p:cNvPr id="3" name="縦書きテキスト プレースホルダー 2">
             <a:extLst>
               <a:ext uri="{FF2B5EF4-FFF2-40B4-BE49-F238E27FC236}">
-                <a16:creationId xmlns:a16="http://schemas.microsoft.com/office/drawing/2014/main" id="{D7464D88-9673-8E5D-2572-4A4687738B3A}"/>
+                <a16:creationId xmlns:a16="http://schemas.microsoft.com/office/drawing/2014/main" id="{1002FC6A-DE5D-E39E-E93F-D4E88920B989}"/>
               </a:ext>
             </a:extLst>
           </p:cNvPr>
@@ -711,7 +711,7 @@
           <p:cNvPr id="4" name="日付プレースホルダー 3">
             <a:extLst>
               <a:ext uri="{FF2B5EF4-FFF2-40B4-BE49-F238E27FC236}">
-                <a16:creationId xmlns:a16="http://schemas.microsoft.com/office/drawing/2014/main" id="{84475D83-A8C3-7ADF-94C5-3562A0A3E51B}"/>
+                <a16:creationId xmlns:a16="http://schemas.microsoft.com/office/drawing/2014/main" id="{D8619F9E-115A-16CF-839D-F1860E41115B}"/>
               </a:ext>
             </a:extLst>
           </p:cNvPr>
@@ -727,7 +727,7 @@
           <a:bodyPr/>
           <a:lstStyle/>
           <a:p>
-            <a:fld id="{8F22A2FD-1F9D-4B18-B395-8A6D1E752C7F}" type="datetimeFigureOut">
+            <a:fld id="{C8794D4D-2B31-496F-804D-F0E0E38FC863}" type="datetimeFigureOut">
               <a:rPr kumimoji="1" lang="ja-JP" altLang="en-US" smtClean="0"/>
               <a:t>2026/7/30</a:t>
             </a:fld>
@@ -740,7 +740,7 @@
           <p:cNvPr id="5" name="フッター プレースホルダー 4">
             <a:extLst>
               <a:ext uri="{FF2B5EF4-FFF2-40B4-BE49-F238E27FC236}">
-                <a16:creationId xmlns:a16="http://schemas.microsoft.com/office/drawing/2014/main" id="{127885DD-AE5D-7081-2C1E-D0DC03A7BC8D}"/>
+                <a16:creationId xmlns:a16="http://schemas.microsoft.com/office/drawing/2014/main" id="{D41EBC03-3F12-3378-0A4B-1235CEA15D48}"/>
               </a:ext>
             </a:extLst>
           </p:cNvPr>
@@ -765,7 +765,7 @@
           <p:cNvPr id="6" name="スライド番号プレースホルダー 5">
             <a:extLst>
               <a:ext uri="{FF2B5EF4-FFF2-40B4-BE49-F238E27FC236}">
-                <a16:creationId xmlns:a16="http://schemas.microsoft.com/office/drawing/2014/main" id="{B0287B43-D166-54FC-348B-88B19222E248}"/>
+                <a16:creationId xmlns:a16="http://schemas.microsoft.com/office/drawing/2014/main" id="{1F2B4BAB-735B-4B4C-9C65-3C0E36E43745}"/>
               </a:ext>
             </a:extLst>
           </p:cNvPr>
@@ -781,7 +781,7 @@
           <a:bodyPr/>
           <a:lstStyle/>
           <a:p>
-            <a:fld id="{1049705E-E65F-4190-8574-29A797FECD3E}" type="slidenum">
+            <a:fld id="{9D8152CF-B58D-4629-8196-10461BEDFA97}" type="slidenum">
               <a:rPr kumimoji="1" lang="ja-JP" altLang="en-US" smtClean="0"/>
               <a:t>‹#›</a:t>
             </a:fld>
@@ -792,7 +792,7 @@
     </p:spTree>
     <p:extLst>
       <p:ext uri="{BB962C8B-B14F-4D97-AF65-F5344CB8AC3E}">
-        <p14:creationId xmlns:p14="http://schemas.microsoft.com/office/powerpoint/2010/main" val="819422707"/>
+        <p14:creationId xmlns:p14="http://schemas.microsoft.com/office/powerpoint/2010/main" val="2176174317"/>
       </p:ext>
     </p:extLst>
   </p:cSld>
@@ -824,7 +824,7 @@
           <p:cNvPr id="2" name="タイトル 1">
             <a:extLst>
               <a:ext uri="{FF2B5EF4-FFF2-40B4-BE49-F238E27FC236}">
-                <a16:creationId xmlns:a16="http://schemas.microsoft.com/office/drawing/2014/main" id="{E45C0D75-1A8A-C41B-5061-CBDA55BD3920}"/>
+                <a16:creationId xmlns:a16="http://schemas.microsoft.com/office/drawing/2014/main" id="{EFCBBEAD-505B-AB95-3923-92FBF226172A}"/>
               </a:ext>
             </a:extLst>
           </p:cNvPr>
@@ -852,7 +852,7 @@
           <p:cNvPr id="3" name="コンテンツ プレースホルダー 2">
             <a:extLst>
               <a:ext uri="{FF2B5EF4-FFF2-40B4-BE49-F238E27FC236}">
-                <a16:creationId xmlns:a16="http://schemas.microsoft.com/office/drawing/2014/main" id="{245451CE-3E75-69A7-994B-CD06A127003B}"/>
+                <a16:creationId xmlns:a16="http://schemas.microsoft.com/office/drawing/2014/main" id="{33A7F310-447A-90FB-61F8-953C00864DEC}"/>
               </a:ext>
             </a:extLst>
           </p:cNvPr>
@@ -941,7 +941,7 @@
           <p:cNvPr id="4" name="日付プレースホルダー 3">
             <a:extLst>
               <a:ext uri="{FF2B5EF4-FFF2-40B4-BE49-F238E27FC236}">
-                <a16:creationId xmlns:a16="http://schemas.microsoft.com/office/drawing/2014/main" id="{F3E18FD7-7432-F56C-4520-8E8423F0B4D1}"/>
+                <a16:creationId xmlns:a16="http://schemas.microsoft.com/office/drawing/2014/main" id="{E3295AAC-EC73-6CFA-0AF9-D72B1C526947}"/>
               </a:ext>
             </a:extLst>
           </p:cNvPr>
@@ -957,7 +957,7 @@
           <a:bodyPr/>
           <a:lstStyle/>
           <a:p>
-            <a:fld id="{8F22A2FD-1F9D-4B18-B395-8A6D1E752C7F}" type="datetimeFigureOut">
+            <a:fld id="{C8794D4D-2B31-496F-804D-F0E0E38FC863}" type="datetimeFigureOut">
               <a:rPr kumimoji="1" lang="ja-JP" altLang="en-US" smtClean="0"/>
               <a:t>2026/7/30</a:t>
             </a:fld>
@@ -970,7 +970,7 @@
           <p:cNvPr id="5" name="フッター プレースホルダー 4">
             <a:extLst>
               <a:ext uri="{FF2B5EF4-FFF2-40B4-BE49-F238E27FC236}">
-                <a16:creationId xmlns:a16="http://schemas.microsoft.com/office/drawing/2014/main" id="{FEBD6C95-9802-E801-6826-0B37BE0B8763}"/>
+                <a16:creationId xmlns:a16="http://schemas.microsoft.com/office/drawing/2014/main" id="{5A7E151E-4BC2-2665-0F0F-E6AD792B2583}"/>
               </a:ext>
             </a:extLst>
           </p:cNvPr>
@@ -995,7 +995,7 @@
           <p:cNvPr id="6" name="スライド番号プレースホルダー 5">
             <a:extLst>
               <a:ext uri="{FF2B5EF4-FFF2-40B4-BE49-F238E27FC236}">
-                <a16:creationId xmlns:a16="http://schemas.microsoft.com/office/drawing/2014/main" id="{82953767-885A-479F-12A0-89A71F4FECD2}"/>
+                <a16:creationId xmlns:a16="http://schemas.microsoft.com/office/drawing/2014/main" id="{4168E55C-6668-5307-EE0B-7BA1FEF080AD}"/>
               </a:ext>
             </a:extLst>
           </p:cNvPr>
@@ -1011,7 +1011,7 @@
           <a:bodyPr/>
           <a:lstStyle/>
           <a:p>
-            <a:fld id="{1049705E-E65F-4190-8574-29A797FECD3E}" type="slidenum">
+            <a:fld id="{9D8152CF-B58D-4629-8196-10461BEDFA97}" type="slidenum">
               <a:rPr kumimoji="1" lang="ja-JP" altLang="en-US" smtClean="0"/>
               <a:t>‹#›</a:t>
             </a:fld>
@@ -1022,7 +1022,7 @@
     </p:spTree>
     <p:extLst>
       <p:ext uri="{BB962C8B-B14F-4D97-AF65-F5344CB8AC3E}">
-        <p14:creationId xmlns:p14="http://schemas.microsoft.com/office/powerpoint/2010/main" val="4037580713"/>
+        <p14:creationId xmlns:p14="http://schemas.microsoft.com/office/powerpoint/2010/main" val="963419665"/>
       </p:ext>
     </p:extLst>
   </p:cSld>
@@ -1054,7 +1054,7 @@
           <p:cNvPr id="2" name="タイトル 1">
             <a:extLst>
               <a:ext uri="{FF2B5EF4-FFF2-40B4-BE49-F238E27FC236}">
-                <a16:creationId xmlns:a16="http://schemas.microsoft.com/office/drawing/2014/main" id="{CD2BFCF8-210D-91F9-F07E-E6C9F1AC5977}"/>
+                <a16:creationId xmlns:a16="http://schemas.microsoft.com/office/drawing/2014/main" id="{CDC81F97-627F-7625-B699-5BCDCDDC302A}"/>
               </a:ext>
             </a:extLst>
           </p:cNvPr>
@@ -1091,7 +1091,7 @@
           <p:cNvPr id="3" name="テキスト プレースホルダー 2">
             <a:extLst>
               <a:ext uri="{FF2B5EF4-FFF2-40B4-BE49-F238E27FC236}">
-                <a16:creationId xmlns:a16="http://schemas.microsoft.com/office/drawing/2014/main" id="{6728AA41-A281-7D55-E433-917835AF922A}"/>
+                <a16:creationId xmlns:a16="http://schemas.microsoft.com/office/drawing/2014/main" id="{14CFBE5D-7E83-F439-E54D-66A76C241466}"/>
               </a:ext>
             </a:extLst>
           </p:cNvPr>
@@ -1216,7 +1216,7 @@
           <p:cNvPr id="4" name="日付プレースホルダー 3">
             <a:extLst>
               <a:ext uri="{FF2B5EF4-FFF2-40B4-BE49-F238E27FC236}">
-                <a16:creationId xmlns:a16="http://schemas.microsoft.com/office/drawing/2014/main" id="{0994D53D-3652-C9F0-4518-F4AB4EAFB397}"/>
+                <a16:creationId xmlns:a16="http://schemas.microsoft.com/office/drawing/2014/main" id="{A8BF162B-6CE5-F829-48B6-9BDDC7C60698}"/>
               </a:ext>
             </a:extLst>
           </p:cNvPr>
@@ -1232,7 +1232,7 @@
           <a:bodyPr/>
           <a:lstStyle/>
           <a:p>
-            <a:fld id="{8F22A2FD-1F9D-4B18-B395-8A6D1E752C7F}" type="datetimeFigureOut">
+            <a:fld id="{C8794D4D-2B31-496F-804D-F0E0E38FC863}" type="datetimeFigureOut">
               <a:rPr kumimoji="1" lang="ja-JP" altLang="en-US" smtClean="0"/>
               <a:t>2026/7/30</a:t>
             </a:fld>
@@ -1245,7 +1245,7 @@
           <p:cNvPr id="5" name="フッター プレースホルダー 4">
             <a:extLst>
               <a:ext uri="{FF2B5EF4-FFF2-40B4-BE49-F238E27FC236}">
-                <a16:creationId xmlns:a16="http://schemas.microsoft.com/office/drawing/2014/main" id="{92FC2C83-9EB6-E817-6C32-C157AF552B76}"/>
+                <a16:creationId xmlns:a16="http://schemas.microsoft.com/office/drawing/2014/main" id="{DFE85314-A02D-C672-1405-89AE85B3B86A}"/>
               </a:ext>
             </a:extLst>
           </p:cNvPr>
@@ -1270,7 +1270,7 @@
           <p:cNvPr id="6" name="スライド番号プレースホルダー 5">
             <a:extLst>
               <a:ext uri="{FF2B5EF4-FFF2-40B4-BE49-F238E27FC236}">
-                <a16:creationId xmlns:a16="http://schemas.microsoft.com/office/drawing/2014/main" id="{EEC741AB-FBF2-11BE-8CE3-79A205ABA3F3}"/>
+                <a16:creationId xmlns:a16="http://schemas.microsoft.com/office/drawing/2014/main" id="{98B4590F-9BA8-7471-97BD-7C9B0B58DE37}"/>
               </a:ext>
             </a:extLst>
           </p:cNvPr>
@@ -1286,7 +1286,7 @@
           <a:bodyPr/>
           <a:lstStyle/>
           <a:p>
-            <a:fld id="{1049705E-E65F-4190-8574-29A797FECD3E}" type="slidenum">
+            <a:fld id="{9D8152CF-B58D-4629-8196-10461BEDFA97}" type="slidenum">
               <a:rPr kumimoji="1" lang="ja-JP" altLang="en-US" smtClean="0"/>
               <a:t>‹#›</a:t>
             </a:fld>
@@ -1297,7 +1297,7 @@
     </p:spTree>
     <p:extLst>
       <p:ext uri="{BB962C8B-B14F-4D97-AF65-F5344CB8AC3E}">
-        <p14:creationId xmlns:p14="http://schemas.microsoft.com/office/powerpoint/2010/main" val="305801440"/>
+        <p14:creationId xmlns:p14="http://schemas.microsoft.com/office/powerpoint/2010/main" val="2705645139"/>
       </p:ext>
     </p:extLst>
   </p:cSld>
@@ -1329,7 +1329,7 @@
           <p:cNvPr id="2" name="タイトル 1">
             <a:extLst>
               <a:ext uri="{FF2B5EF4-FFF2-40B4-BE49-F238E27FC236}">
-                <a16:creationId xmlns:a16="http://schemas.microsoft.com/office/drawing/2014/main" id="{95375C51-5551-0826-1922-9B310606DA06}"/>
+                <a16:creationId xmlns:a16="http://schemas.microsoft.com/office/drawing/2014/main" id="{53DE14E9-A307-2472-71DC-1003B6CE1CFC}"/>
               </a:ext>
             </a:extLst>
           </p:cNvPr>
@@ -1357,7 +1357,7 @@
           <p:cNvPr id="3" name="コンテンツ プレースホルダー 2">
             <a:extLst>
               <a:ext uri="{FF2B5EF4-FFF2-40B4-BE49-F238E27FC236}">
-                <a16:creationId xmlns:a16="http://schemas.microsoft.com/office/drawing/2014/main" id="{F24902B3-2722-9730-5D0C-5EE2622AD491}"/>
+                <a16:creationId xmlns:a16="http://schemas.microsoft.com/office/drawing/2014/main" id="{4F835545-B163-28F4-F76E-F68A8B1D1248}"/>
               </a:ext>
             </a:extLst>
           </p:cNvPr>
@@ -1451,7 +1451,7 @@
           <p:cNvPr id="4" name="コンテンツ プレースホルダー 3">
             <a:extLst>
               <a:ext uri="{FF2B5EF4-FFF2-40B4-BE49-F238E27FC236}">
-                <a16:creationId xmlns:a16="http://schemas.microsoft.com/office/drawing/2014/main" id="{9C8D9BBA-84AD-6BFE-E235-2097B8A81FC9}"/>
+                <a16:creationId xmlns:a16="http://schemas.microsoft.com/office/drawing/2014/main" id="{88784260-3496-119C-77FA-F8D8321F0E9D}"/>
               </a:ext>
             </a:extLst>
           </p:cNvPr>
@@ -1545,7 +1545,7 @@
           <p:cNvPr id="5" name="日付プレースホルダー 4">
             <a:extLst>
               <a:ext uri="{FF2B5EF4-FFF2-40B4-BE49-F238E27FC236}">
-                <a16:creationId xmlns:a16="http://schemas.microsoft.com/office/drawing/2014/main" id="{C17E558D-02CC-BA2B-3254-054FD5639544}"/>
+                <a16:creationId xmlns:a16="http://schemas.microsoft.com/office/drawing/2014/main" id="{633B85BE-C267-EAA3-032E-D8533C82BE6B}"/>
               </a:ext>
             </a:extLst>
           </p:cNvPr>
@@ -1561,7 +1561,7 @@
           <a:bodyPr/>
           <a:lstStyle/>
           <a:p>
-            <a:fld id="{8F22A2FD-1F9D-4B18-B395-8A6D1E752C7F}" type="datetimeFigureOut">
+            <a:fld id="{C8794D4D-2B31-496F-804D-F0E0E38FC863}" type="datetimeFigureOut">
               <a:rPr kumimoji="1" lang="ja-JP" altLang="en-US" smtClean="0"/>
               <a:t>2026/7/30</a:t>
             </a:fld>
@@ -1574,7 +1574,7 @@
           <p:cNvPr id="6" name="フッター プレースホルダー 5">
             <a:extLst>
               <a:ext uri="{FF2B5EF4-FFF2-40B4-BE49-F238E27FC236}">
-                <a16:creationId xmlns:a16="http://schemas.microsoft.com/office/drawing/2014/main" id="{9603EA44-37D3-E812-992A-CEDC6F0A2F94}"/>
+                <a16:creationId xmlns:a16="http://schemas.microsoft.com/office/drawing/2014/main" id="{29CF9F1F-48B9-02F8-541D-EE5E986E88FB}"/>
               </a:ext>
             </a:extLst>
           </p:cNvPr>
@@ -1599,7 +1599,7 @@
           <p:cNvPr id="7" name="スライド番号プレースホルダー 6">
             <a:extLst>
               <a:ext uri="{FF2B5EF4-FFF2-40B4-BE49-F238E27FC236}">
-                <a16:creationId xmlns:a16="http://schemas.microsoft.com/office/drawing/2014/main" id="{6A44107D-3D0C-CBBA-3952-609BC4F238CD}"/>
+                <a16:creationId xmlns:a16="http://schemas.microsoft.com/office/drawing/2014/main" id="{622A8CA2-A5C9-89FE-D546-8B0FEAC53B19}"/>
               </a:ext>
             </a:extLst>
           </p:cNvPr>
@@ -1615,7 +1615,7 @@
           <a:bodyPr/>
           <a:lstStyle/>
           <a:p>
-            <a:fld id="{1049705E-E65F-4190-8574-29A797FECD3E}" type="slidenum">
+            <a:fld id="{9D8152CF-B58D-4629-8196-10461BEDFA97}" type="slidenum">
               <a:rPr kumimoji="1" lang="ja-JP" altLang="en-US" smtClean="0"/>
               <a:t>‹#›</a:t>
             </a:fld>
@@ -1626,7 +1626,7 @@
     </p:spTree>
     <p:extLst>
       <p:ext uri="{BB962C8B-B14F-4D97-AF65-F5344CB8AC3E}">
-        <p14:creationId xmlns:p14="http://schemas.microsoft.com/office/powerpoint/2010/main" val="3843364634"/>
+        <p14:creationId xmlns:p14="http://schemas.microsoft.com/office/powerpoint/2010/main" val="3390456844"/>
       </p:ext>
     </p:extLst>
   </p:cSld>
@@ -1658,7 +1658,7 @@
           <p:cNvPr id="2" name="タイトル 1">
             <a:extLst>
               <a:ext uri="{FF2B5EF4-FFF2-40B4-BE49-F238E27FC236}">
-                <a16:creationId xmlns:a16="http://schemas.microsoft.com/office/drawing/2014/main" id="{D7905D4E-9135-CFF0-777A-695F59CE705B}"/>
+                <a16:creationId xmlns:a16="http://schemas.microsoft.com/office/drawing/2014/main" id="{5D1D9A33-01A3-19B8-95EF-0CD37BB82F32}"/>
               </a:ext>
             </a:extLst>
           </p:cNvPr>
@@ -1691,7 +1691,7 @@
           <p:cNvPr id="3" name="テキスト プレースホルダー 2">
             <a:extLst>
               <a:ext uri="{FF2B5EF4-FFF2-40B4-BE49-F238E27FC236}">
-                <a16:creationId xmlns:a16="http://schemas.microsoft.com/office/drawing/2014/main" id="{2357ED9C-755A-7F07-3D38-E3F12E69DC2D}"/>
+                <a16:creationId xmlns:a16="http://schemas.microsoft.com/office/drawing/2014/main" id="{A652E539-3CF3-3ADF-E720-FB9CA6027A92}"/>
               </a:ext>
             </a:extLst>
           </p:cNvPr>
@@ -1762,7 +1762,7 @@
           <p:cNvPr id="4" name="コンテンツ プレースホルダー 3">
             <a:extLst>
               <a:ext uri="{FF2B5EF4-FFF2-40B4-BE49-F238E27FC236}">
-                <a16:creationId xmlns:a16="http://schemas.microsoft.com/office/drawing/2014/main" id="{E109FC91-D266-EE0C-B10A-528F47A497EB}"/>
+                <a16:creationId xmlns:a16="http://schemas.microsoft.com/office/drawing/2014/main" id="{70215F11-3DAA-92D8-8C7D-9A00234568A2}"/>
               </a:ext>
             </a:extLst>
           </p:cNvPr>
@@ -1856,7 +1856,7 @@
           <p:cNvPr id="5" name="テキスト プレースホルダー 4">
             <a:extLst>
               <a:ext uri="{FF2B5EF4-FFF2-40B4-BE49-F238E27FC236}">
-                <a16:creationId xmlns:a16="http://schemas.microsoft.com/office/drawing/2014/main" id="{07ACC135-732F-F265-2101-9509F0AC740D}"/>
+                <a16:creationId xmlns:a16="http://schemas.microsoft.com/office/drawing/2014/main" id="{B774A262-D9F6-0969-BE4E-54DE803B19E2}"/>
               </a:ext>
             </a:extLst>
           </p:cNvPr>
@@ -1927,7 +1927,7 @@
           <p:cNvPr id="6" name="コンテンツ プレースホルダー 5">
             <a:extLst>
               <a:ext uri="{FF2B5EF4-FFF2-40B4-BE49-F238E27FC236}">
-                <a16:creationId xmlns:a16="http://schemas.microsoft.com/office/drawing/2014/main" id="{C3FC1381-BEFB-D8E7-0BB9-E9149FA7B7D0}"/>
+                <a16:creationId xmlns:a16="http://schemas.microsoft.com/office/drawing/2014/main" id="{13B9680A-019D-619F-5BC7-6A66535882FC}"/>
               </a:ext>
             </a:extLst>
           </p:cNvPr>
@@ -2021,7 +2021,7 @@
           <p:cNvPr id="7" name="日付プレースホルダー 6">
             <a:extLst>
               <a:ext uri="{FF2B5EF4-FFF2-40B4-BE49-F238E27FC236}">
-                <a16:creationId xmlns:a16="http://schemas.microsoft.com/office/drawing/2014/main" id="{CEBAA97C-AEDA-F46B-BEA9-7B12BC03A12A}"/>
+                <a16:creationId xmlns:a16="http://schemas.microsoft.com/office/drawing/2014/main" id="{D57BBEB8-1DD6-E99B-57B2-B24B6FBFB420}"/>
               </a:ext>
             </a:extLst>
           </p:cNvPr>
@@ -2037,7 +2037,7 @@
           <a:bodyPr/>
           <a:lstStyle/>
           <a:p>
-            <a:fld id="{8F22A2FD-1F9D-4B18-B395-8A6D1E752C7F}" type="datetimeFigureOut">
+            <a:fld id="{C8794D4D-2B31-496F-804D-F0E0E38FC863}" type="datetimeFigureOut">
               <a:rPr kumimoji="1" lang="ja-JP" altLang="en-US" smtClean="0"/>
               <a:t>2026/7/30</a:t>
             </a:fld>
@@ -2050,7 +2050,7 @@
           <p:cNvPr id="8" name="フッター プレースホルダー 7">
             <a:extLst>
               <a:ext uri="{FF2B5EF4-FFF2-40B4-BE49-F238E27FC236}">
-                <a16:creationId xmlns:a16="http://schemas.microsoft.com/office/drawing/2014/main" id="{00E2AB4E-6F15-1A86-9151-078CB1F0ADA8}"/>
+                <a16:creationId xmlns:a16="http://schemas.microsoft.com/office/drawing/2014/main" id="{66C18B5A-1354-1CB1-EAE4-771AE40AC5D0}"/>
               </a:ext>
             </a:extLst>
           </p:cNvPr>
@@ -2075,7 +2075,7 @@
           <p:cNvPr id="9" name="スライド番号プレースホルダー 8">
             <a:extLst>
               <a:ext uri="{FF2B5EF4-FFF2-40B4-BE49-F238E27FC236}">
-                <a16:creationId xmlns:a16="http://schemas.microsoft.com/office/drawing/2014/main" id="{DA1CB6CF-D67D-BE1E-1FA2-F5E8AB3DA327}"/>
+                <a16:creationId xmlns:a16="http://schemas.microsoft.com/office/drawing/2014/main" id="{943CE403-DBBB-A000-8CFB-3EB51DDEFD93}"/>
               </a:ext>
             </a:extLst>
           </p:cNvPr>
@@ -2091,7 +2091,7 @@
           <a:bodyPr/>
           <a:lstStyle/>
           <a:p>
-            <a:fld id="{1049705E-E65F-4190-8574-29A797FECD3E}" type="slidenum">
+            <a:fld id="{9D8152CF-B58D-4629-8196-10461BEDFA97}" type="slidenum">
               <a:rPr kumimoji="1" lang="ja-JP" altLang="en-US" smtClean="0"/>
               <a:t>‹#›</a:t>
             </a:fld>
@@ -2102,7 +2102,7 @@
     </p:spTree>
     <p:extLst>
       <p:ext uri="{BB962C8B-B14F-4D97-AF65-F5344CB8AC3E}">
-        <p14:creationId xmlns:p14="http://schemas.microsoft.com/office/powerpoint/2010/main" val="1384478490"/>
+        <p14:creationId xmlns:p14="http://schemas.microsoft.com/office/powerpoint/2010/main" val="102594586"/>
       </p:ext>
     </p:extLst>
   </p:cSld>
@@ -2134,7 +2134,7 @@
           <p:cNvPr id="2" name="タイトル 1">
             <a:extLst>
               <a:ext uri="{FF2B5EF4-FFF2-40B4-BE49-F238E27FC236}">
-                <a16:creationId xmlns:a16="http://schemas.microsoft.com/office/drawing/2014/main" id="{B36A2D65-0046-A416-B45C-F326250A2842}"/>
+                <a16:creationId xmlns:a16="http://schemas.microsoft.com/office/drawing/2014/main" id="{14BC7C38-E5CE-F1D6-B8FE-160EAABC6B48}"/>
               </a:ext>
             </a:extLst>
           </p:cNvPr>
@@ -2162,7 +2162,7 @@
           <p:cNvPr id="3" name="日付プレースホルダー 2">
             <a:extLst>
               <a:ext uri="{FF2B5EF4-FFF2-40B4-BE49-F238E27FC236}">
-                <a16:creationId xmlns:a16="http://schemas.microsoft.com/office/drawing/2014/main" id="{F50F8729-44CF-3D32-8078-D4A060A96878}"/>
+                <a16:creationId xmlns:a16="http://schemas.microsoft.com/office/drawing/2014/main" id="{78E462DB-75F0-321E-6241-E00F0EFAC151}"/>
               </a:ext>
             </a:extLst>
           </p:cNvPr>
@@ -2178,7 +2178,7 @@
           <a:bodyPr/>
           <a:lstStyle/>
           <a:p>
-            <a:fld id="{8F22A2FD-1F9D-4B18-B395-8A6D1E752C7F}" type="datetimeFigureOut">
+            <a:fld id="{C8794D4D-2B31-496F-804D-F0E0E38FC863}" type="datetimeFigureOut">
               <a:rPr kumimoji="1" lang="ja-JP" altLang="en-US" smtClean="0"/>
               <a:t>2026/7/30</a:t>
             </a:fld>
@@ -2191,7 +2191,7 @@
           <p:cNvPr id="4" name="フッター プレースホルダー 3">
             <a:extLst>
               <a:ext uri="{FF2B5EF4-FFF2-40B4-BE49-F238E27FC236}">
-                <a16:creationId xmlns:a16="http://schemas.microsoft.com/office/drawing/2014/main" id="{38D9C458-27FB-E927-2A24-1D11EDA86E0C}"/>
+                <a16:creationId xmlns:a16="http://schemas.microsoft.com/office/drawing/2014/main" id="{2714610A-786D-0D46-C766-85538894597F}"/>
               </a:ext>
             </a:extLst>
           </p:cNvPr>
@@ -2216,7 +2216,7 @@
           <p:cNvPr id="5" name="スライド番号プレースホルダー 4">
             <a:extLst>
               <a:ext uri="{FF2B5EF4-FFF2-40B4-BE49-F238E27FC236}">
-                <a16:creationId xmlns:a16="http://schemas.microsoft.com/office/drawing/2014/main" id="{909240C5-E342-6D92-E661-03832AF25D43}"/>
+                <a16:creationId xmlns:a16="http://schemas.microsoft.com/office/drawing/2014/main" id="{5EAEC4C6-BB19-0BA3-AA6B-8EE8278CB28F}"/>
               </a:ext>
             </a:extLst>
           </p:cNvPr>
@@ -2232,7 +2232,7 @@
           <a:bodyPr/>
           <a:lstStyle/>
           <a:p>
-            <a:fld id="{1049705E-E65F-4190-8574-29A797FECD3E}" type="slidenum">
+            <a:fld id="{9D8152CF-B58D-4629-8196-10461BEDFA97}" type="slidenum">
               <a:rPr kumimoji="1" lang="ja-JP" altLang="en-US" smtClean="0"/>
               <a:t>‹#›</a:t>
             </a:fld>
@@ -2243,7 +2243,7 @@
     </p:spTree>
     <p:extLst>
       <p:ext uri="{BB962C8B-B14F-4D97-AF65-F5344CB8AC3E}">
-        <p14:creationId xmlns:p14="http://schemas.microsoft.com/office/powerpoint/2010/main" val="240223244"/>
+        <p14:creationId xmlns:p14="http://schemas.microsoft.com/office/powerpoint/2010/main" val="2942068620"/>
       </p:ext>
     </p:extLst>
   </p:cSld>
@@ -2275,7 +2275,7 @@
           <p:cNvPr id="2" name="日付プレースホルダー 1">
             <a:extLst>
               <a:ext uri="{FF2B5EF4-FFF2-40B4-BE49-F238E27FC236}">
-                <a16:creationId xmlns:a16="http://schemas.microsoft.com/office/drawing/2014/main" id="{BB5D82DD-9680-A6A1-BA47-93976FC28108}"/>
+                <a16:creationId xmlns:a16="http://schemas.microsoft.com/office/drawing/2014/main" id="{2B13B5B1-CD1E-2453-BC17-5212A0003AC0}"/>
               </a:ext>
             </a:extLst>
           </p:cNvPr>
@@ -2291,7 +2291,7 @@
           <a:bodyPr/>
           <a:lstStyle/>
           <a:p>
-            <a:fld id="{8F22A2FD-1F9D-4B18-B395-8A6D1E752C7F}" type="datetimeFigureOut">
+            <a:fld id="{C8794D4D-2B31-496F-804D-F0E0E38FC863}" type="datetimeFigureOut">
               <a:rPr kumimoji="1" lang="ja-JP" altLang="en-US" smtClean="0"/>
               <a:t>2026/7/30</a:t>
             </a:fld>
@@ -2304,7 +2304,7 @@
           <p:cNvPr id="3" name="フッター プレースホルダー 2">
             <a:extLst>
               <a:ext uri="{FF2B5EF4-FFF2-40B4-BE49-F238E27FC236}">
-                <a16:creationId xmlns:a16="http://schemas.microsoft.com/office/drawing/2014/main" id="{C1079E4D-8631-22BF-8D9D-6164A1F44E54}"/>
+                <a16:creationId xmlns:a16="http://schemas.microsoft.com/office/drawing/2014/main" id="{5E2E5E49-3256-D96E-63A6-879C0B2F277B}"/>
               </a:ext>
             </a:extLst>
           </p:cNvPr>
@@ -2329,7 +2329,7 @@
           <p:cNvPr id="4" name="スライド番号プレースホルダー 3">
             <a:extLst>
               <a:ext uri="{FF2B5EF4-FFF2-40B4-BE49-F238E27FC236}">
-                <a16:creationId xmlns:a16="http://schemas.microsoft.com/office/drawing/2014/main" id="{E61B3024-1000-DFB0-2CD2-034202796168}"/>
+                <a16:creationId xmlns:a16="http://schemas.microsoft.com/office/drawing/2014/main" id="{45472E64-2737-85D6-6E0B-8504961BB510}"/>
               </a:ext>
             </a:extLst>
           </p:cNvPr>
@@ -2345,7 +2345,7 @@
           <a:bodyPr/>
           <a:lstStyle/>
           <a:p>
-            <a:fld id="{1049705E-E65F-4190-8574-29A797FECD3E}" type="slidenum">
+            <a:fld id="{9D8152CF-B58D-4629-8196-10461BEDFA97}" type="slidenum">
               <a:rPr kumimoji="1" lang="ja-JP" altLang="en-US" smtClean="0"/>
               <a:t>‹#›</a:t>
             </a:fld>
@@ -2356,7 +2356,7 @@
     </p:spTree>
     <p:extLst>
       <p:ext uri="{BB962C8B-B14F-4D97-AF65-F5344CB8AC3E}">
-        <p14:creationId xmlns:p14="http://schemas.microsoft.com/office/powerpoint/2010/main" val="511576393"/>
+        <p14:creationId xmlns:p14="http://schemas.microsoft.com/office/powerpoint/2010/main" val="669780885"/>
       </p:ext>
     </p:extLst>
   </p:cSld>
@@ -2388,7 +2388,7 @@
           <p:cNvPr id="2" name="タイトル 1">
             <a:extLst>
               <a:ext uri="{FF2B5EF4-FFF2-40B4-BE49-F238E27FC236}">
-                <a16:creationId xmlns:a16="http://schemas.microsoft.com/office/drawing/2014/main" id="{F3EE2384-CAA4-5AD1-0443-CBA65F904380}"/>
+                <a16:creationId xmlns:a16="http://schemas.microsoft.com/office/drawing/2014/main" id="{89134EB3-1364-A226-21A9-FE6732DB2696}"/>
               </a:ext>
             </a:extLst>
           </p:cNvPr>
@@ -2425,7 +2425,7 @@
           <p:cNvPr id="3" name="コンテンツ プレースホルダー 2">
             <a:extLst>
               <a:ext uri="{FF2B5EF4-FFF2-40B4-BE49-F238E27FC236}">
-                <a16:creationId xmlns:a16="http://schemas.microsoft.com/office/drawing/2014/main" id="{153CC720-B5D3-5C73-B0C7-56F15D5CF241}"/>
+                <a16:creationId xmlns:a16="http://schemas.microsoft.com/office/drawing/2014/main" id="{B3C3B7D6-D7A4-1B50-3A8E-5A1943D65E5F}"/>
               </a:ext>
             </a:extLst>
           </p:cNvPr>
@@ -2547,7 +2547,7 @@
           <p:cNvPr id="4" name="テキスト プレースホルダー 3">
             <a:extLst>
               <a:ext uri="{FF2B5EF4-FFF2-40B4-BE49-F238E27FC236}">
-                <a16:creationId xmlns:a16="http://schemas.microsoft.com/office/drawing/2014/main" id="{8C6FB6B9-A70A-AF82-E6A9-FE3A3578D929}"/>
+                <a16:creationId xmlns:a16="http://schemas.microsoft.com/office/drawing/2014/main" id="{29EC8E5A-9C1D-B8A4-04C6-DD5447A331B2}"/>
               </a:ext>
             </a:extLst>
           </p:cNvPr>
@@ -2618,7 +2618,7 @@
           <p:cNvPr id="5" name="日付プレースホルダー 4">
             <a:extLst>
               <a:ext uri="{FF2B5EF4-FFF2-40B4-BE49-F238E27FC236}">
-                <a16:creationId xmlns:a16="http://schemas.microsoft.com/office/drawing/2014/main" id="{A5499AED-AA97-F57E-A0D9-BBFE07883E17}"/>
+                <a16:creationId xmlns:a16="http://schemas.microsoft.com/office/drawing/2014/main" id="{1E0CA02A-3120-CACF-6FBA-D44351507B02}"/>
               </a:ext>
             </a:extLst>
           </p:cNvPr>
@@ -2634,7 +2634,7 @@
           <a:bodyPr/>
           <a:lstStyle/>
           <a:p>
-            <a:fld id="{8F22A2FD-1F9D-4B18-B395-8A6D1E752C7F}" type="datetimeFigureOut">
+            <a:fld id="{C8794D4D-2B31-496F-804D-F0E0E38FC863}" type="datetimeFigureOut">
               <a:rPr kumimoji="1" lang="ja-JP" altLang="en-US" smtClean="0"/>
               <a:t>2026/7/30</a:t>
             </a:fld>
@@ -2647,7 +2647,7 @@
           <p:cNvPr id="6" name="フッター プレースホルダー 5">
             <a:extLst>
               <a:ext uri="{FF2B5EF4-FFF2-40B4-BE49-F238E27FC236}">
-                <a16:creationId xmlns:a16="http://schemas.microsoft.com/office/drawing/2014/main" id="{819E5793-C96B-EE76-24CC-20E355E9FD12}"/>
+                <a16:creationId xmlns:a16="http://schemas.microsoft.com/office/drawing/2014/main" id="{0AA244ED-3C0C-8875-CF07-6D8D68C35071}"/>
               </a:ext>
             </a:extLst>
           </p:cNvPr>
@@ -2672,7 +2672,7 @@
           <p:cNvPr id="7" name="スライド番号プレースホルダー 6">
             <a:extLst>
               <a:ext uri="{FF2B5EF4-FFF2-40B4-BE49-F238E27FC236}">
-                <a16:creationId xmlns:a16="http://schemas.microsoft.com/office/drawing/2014/main" id="{27C5846B-7802-9CF0-4B71-20A01FDA1A57}"/>
+                <a16:creationId xmlns:a16="http://schemas.microsoft.com/office/drawing/2014/main" id="{230598C5-F18F-AB95-1733-8E53D1A3FC88}"/>
               </a:ext>
             </a:extLst>
           </p:cNvPr>
@@ -2688,7 +2688,7 @@
           <a:bodyPr/>
           <a:lstStyle/>
           <a:p>
-            <a:fld id="{1049705E-E65F-4190-8574-29A797FECD3E}" type="slidenum">
+            <a:fld id="{9D8152CF-B58D-4629-8196-10461BEDFA97}" type="slidenum">
               <a:rPr kumimoji="1" lang="ja-JP" altLang="en-US" smtClean="0"/>
               <a:t>‹#›</a:t>
             </a:fld>
@@ -2699,7 +2699,7 @@
     </p:spTree>
     <p:extLst>
       <p:ext uri="{BB962C8B-B14F-4D97-AF65-F5344CB8AC3E}">
-        <p14:creationId xmlns:p14="http://schemas.microsoft.com/office/powerpoint/2010/main" val="2472909899"/>
+        <p14:creationId xmlns:p14="http://schemas.microsoft.com/office/powerpoint/2010/main" val="2777639300"/>
       </p:ext>
     </p:extLst>
   </p:cSld>
@@ -2731,7 +2731,7 @@
           <p:cNvPr id="2" name="タイトル 1">
             <a:extLst>
               <a:ext uri="{FF2B5EF4-FFF2-40B4-BE49-F238E27FC236}">
-                <a16:creationId xmlns:a16="http://schemas.microsoft.com/office/drawing/2014/main" id="{AD3B4DBC-DE5E-7158-F209-4855108D4510}"/>
+                <a16:creationId xmlns:a16="http://schemas.microsoft.com/office/drawing/2014/main" id="{7EDEBDBE-C9C5-9694-C624-87FD1D55A350}"/>
               </a:ext>
             </a:extLst>
           </p:cNvPr>
@@ -2768,7 +2768,7 @@
           <p:cNvPr id="3" name="図プレースホルダー 2">
             <a:extLst>
               <a:ext uri="{FF2B5EF4-FFF2-40B4-BE49-F238E27FC236}">
-                <a16:creationId xmlns:a16="http://schemas.microsoft.com/office/drawing/2014/main" id="{95D1C37D-128B-5548-C058-0BE6789D9840}"/>
+                <a16:creationId xmlns:a16="http://schemas.microsoft.com/office/drawing/2014/main" id="{78CEAE49-F40D-BCAB-2869-9F434A75AF0E}"/>
               </a:ext>
             </a:extLst>
           </p:cNvPr>
@@ -2835,7 +2835,7 @@
           <p:cNvPr id="4" name="テキスト プレースホルダー 3">
             <a:extLst>
               <a:ext uri="{FF2B5EF4-FFF2-40B4-BE49-F238E27FC236}">
-                <a16:creationId xmlns:a16="http://schemas.microsoft.com/office/drawing/2014/main" id="{A1DA4B46-8949-B72D-06B1-D8AD70799022}"/>
+                <a16:creationId xmlns:a16="http://schemas.microsoft.com/office/drawing/2014/main" id="{D164AE96-9227-897A-387B-70BE118EF03A}"/>
               </a:ext>
             </a:extLst>
           </p:cNvPr>
@@ -2906,7 +2906,7 @@
           <p:cNvPr id="5" name="日付プレースホルダー 4">
             <a:extLst>
               <a:ext uri="{FF2B5EF4-FFF2-40B4-BE49-F238E27FC236}">
-                <a16:creationId xmlns:a16="http://schemas.microsoft.com/office/drawing/2014/main" id="{536FF2E6-5D06-905C-9E34-BAEEDAFBDA7B}"/>
+                <a16:creationId xmlns:a16="http://schemas.microsoft.com/office/drawing/2014/main" id="{0F9E8E15-FF8C-B2A2-EB68-EC2D59A6145A}"/>
               </a:ext>
             </a:extLst>
           </p:cNvPr>
@@ -2922,7 +2922,7 @@
           <a:bodyPr/>
           <a:lstStyle/>
           <a:p>
-            <a:fld id="{8F22A2FD-1F9D-4B18-B395-8A6D1E752C7F}" type="datetimeFigureOut">
+            <a:fld id="{C8794D4D-2B31-496F-804D-F0E0E38FC863}" type="datetimeFigureOut">
               <a:rPr kumimoji="1" lang="ja-JP" altLang="en-US" smtClean="0"/>
               <a:t>2026/7/30</a:t>
             </a:fld>
@@ -2935,7 +2935,7 @@
           <p:cNvPr id="6" name="フッター プレースホルダー 5">
             <a:extLst>
               <a:ext uri="{FF2B5EF4-FFF2-40B4-BE49-F238E27FC236}">
-                <a16:creationId xmlns:a16="http://schemas.microsoft.com/office/drawing/2014/main" id="{4E235EB5-4901-DB5C-F8DF-B5357EC03D1F}"/>
+                <a16:creationId xmlns:a16="http://schemas.microsoft.com/office/drawing/2014/main" id="{0C400785-49F1-5CC2-C5E3-856EF9E39C9F}"/>
               </a:ext>
             </a:extLst>
           </p:cNvPr>
@@ -2960,7 +2960,7 @@
           <p:cNvPr id="7" name="スライド番号プレースホルダー 6">
             <a:extLst>
               <a:ext uri="{FF2B5EF4-FFF2-40B4-BE49-F238E27FC236}">
-                <a16:creationId xmlns:a16="http://schemas.microsoft.com/office/drawing/2014/main" id="{7C19E7B1-B4AA-4C6F-8F7C-9B86BD946552}"/>
+                <a16:creationId xmlns:a16="http://schemas.microsoft.com/office/drawing/2014/main" id="{8D7EAEE3-C039-1000-2241-3659D6E33959}"/>
               </a:ext>
             </a:extLst>
           </p:cNvPr>
@@ -2976,7 +2976,7 @@
           <a:bodyPr/>
           <a:lstStyle/>
           <a:p>
-            <a:fld id="{1049705E-E65F-4190-8574-29A797FECD3E}" type="slidenum">
+            <a:fld id="{9D8152CF-B58D-4629-8196-10461BEDFA97}" type="slidenum">
               <a:rPr kumimoji="1" lang="ja-JP" altLang="en-US" smtClean="0"/>
               <a:t>‹#›</a:t>
             </a:fld>
@@ -2987,7 +2987,7 @@
     </p:spTree>
     <p:extLst>
       <p:ext uri="{BB962C8B-B14F-4D97-AF65-F5344CB8AC3E}">
-        <p14:creationId xmlns:p14="http://schemas.microsoft.com/office/powerpoint/2010/main" val="2559753982"/>
+        <p14:creationId xmlns:p14="http://schemas.microsoft.com/office/powerpoint/2010/main" val="37467916"/>
       </p:ext>
     </p:extLst>
   </p:cSld>
@@ -3024,7 +3024,7 @@
           <p:cNvPr id="2" name="タイトル プレースホルダー 1">
             <a:extLst>
               <a:ext uri="{FF2B5EF4-FFF2-40B4-BE49-F238E27FC236}">
-                <a16:creationId xmlns:a16="http://schemas.microsoft.com/office/drawing/2014/main" id="{B4A0C46B-E8EB-9B42-D689-A78379E0A66C}"/>
+                <a16:creationId xmlns:a16="http://schemas.microsoft.com/office/drawing/2014/main" id="{5795BB31-2A88-B5B6-8A21-94C02B0A2756}"/>
               </a:ext>
             </a:extLst>
           </p:cNvPr>
@@ -3062,7 +3062,7 @@
           <p:cNvPr id="3" name="テキスト プレースホルダー 2">
             <a:extLst>
               <a:ext uri="{FF2B5EF4-FFF2-40B4-BE49-F238E27FC236}">
-                <a16:creationId xmlns:a16="http://schemas.microsoft.com/office/drawing/2014/main" id="{1FF214F2-73ED-6DCB-FCA9-898B33C8A9B2}"/>
+                <a16:creationId xmlns:a16="http://schemas.microsoft.com/office/drawing/2014/main" id="{E9B0383C-1C74-736A-2DF7-0EBFD20282E0}"/>
               </a:ext>
             </a:extLst>
           </p:cNvPr>
@@ -3161,7 +3161,7 @@
           <p:cNvPr id="4" name="日付プレースホルダー 3">
             <a:extLst>
               <a:ext uri="{FF2B5EF4-FFF2-40B4-BE49-F238E27FC236}">
-                <a16:creationId xmlns:a16="http://schemas.microsoft.com/office/drawing/2014/main" id="{E19C7279-0557-B4D1-988E-CF8F575271E4}"/>
+                <a16:creationId xmlns:a16="http://schemas.microsoft.com/office/drawing/2014/main" id="{F7375253-82D5-F828-1580-7BF43E17C0B7}"/>
               </a:ext>
             </a:extLst>
           </p:cNvPr>
@@ -3195,7 +3195,7 @@
             </a:lvl1pPr>
           </a:lstStyle>
           <a:p>
-            <a:fld id="{8F22A2FD-1F9D-4B18-B395-8A6D1E752C7F}" type="datetimeFigureOut">
+            <a:fld id="{C8794D4D-2B31-496F-804D-F0E0E38FC863}" type="datetimeFigureOut">
               <a:rPr kumimoji="1" lang="ja-JP" altLang="en-US" smtClean="0"/>
               <a:t>2026/7/30</a:t>
             </a:fld>
@@ -3208,7 +3208,7 @@
           <p:cNvPr id="5" name="フッター プレースホルダー 4">
             <a:extLst>
               <a:ext uri="{FF2B5EF4-FFF2-40B4-BE49-F238E27FC236}">
-                <a16:creationId xmlns:a16="http://schemas.microsoft.com/office/drawing/2014/main" id="{C86A3266-F1D0-705F-0230-992634740383}"/>
+                <a16:creationId xmlns:a16="http://schemas.microsoft.com/office/drawing/2014/main" id="{1A875946-7C87-2DB5-31D8-BCCA62865463}"/>
               </a:ext>
             </a:extLst>
           </p:cNvPr>
@@ -3251,7 +3251,7 @@
           <p:cNvPr id="6" name="スライド番号プレースホルダー 5">
             <a:extLst>
               <a:ext uri="{FF2B5EF4-FFF2-40B4-BE49-F238E27FC236}">
-                <a16:creationId xmlns:a16="http://schemas.microsoft.com/office/drawing/2014/main" id="{0E7DCC5A-32E6-DADF-B13F-36DF0EE493EA}"/>
+                <a16:creationId xmlns:a16="http://schemas.microsoft.com/office/drawing/2014/main" id="{05D336E7-3637-2759-23E2-A6D1F0F30D09}"/>
               </a:ext>
             </a:extLst>
           </p:cNvPr>
@@ -3285,7 +3285,7 @@
             </a:lvl1pPr>
           </a:lstStyle>
           <a:p>
-            <a:fld id="{1049705E-E65F-4190-8574-29A797FECD3E}" type="slidenum">
+            <a:fld id="{9D8152CF-B58D-4629-8196-10461BEDFA97}" type="slidenum">
               <a:rPr kumimoji="1" lang="ja-JP" altLang="en-US" smtClean="0"/>
               <a:t>‹#›</a:t>
             </a:fld>
@@ -3296,7 +3296,7 @@
     </p:spTree>
     <p:extLst>
       <p:ext uri="{BB962C8B-B14F-4D97-AF65-F5344CB8AC3E}">
-        <p14:creationId xmlns:p14="http://schemas.microsoft.com/office/powerpoint/2010/main" val="4196065553"/>
+        <p14:creationId xmlns:p14="http://schemas.microsoft.com/office/powerpoint/2010/main" val="2047715651"/>
       </p:ext>
     </p:extLst>
   </p:cSld>
@@ -3619,7 +3619,7 @@
           <p:cNvPr id="2" name="テキスト ボックス 1">
             <a:extLst>
               <a:ext uri="{FF2B5EF4-FFF2-40B4-BE49-F238E27FC236}">
-                <a16:creationId xmlns:a16="http://schemas.microsoft.com/office/drawing/2014/main" id="{3013C3DF-D9EF-38F9-A01A-291C2FCB6F3C}"/>
+                <a16:creationId xmlns:a16="http://schemas.microsoft.com/office/drawing/2014/main" id="{E27626A1-7E8F-AF73-ADB8-1F70C3889613}"/>
               </a:ext>
             </a:extLst>
           </p:cNvPr>
@@ -3665,7 +3665,7 @@
           <p:cNvPr id="3" name="テキスト ボックス 2">
             <a:extLst>
               <a:ext uri="{FF2B5EF4-FFF2-40B4-BE49-F238E27FC236}">
-                <a16:creationId xmlns:a16="http://schemas.microsoft.com/office/drawing/2014/main" id="{3776BBB4-F501-869F-B1C2-13C683AFC654}"/>
+                <a16:creationId xmlns:a16="http://schemas.microsoft.com/office/drawing/2014/main" id="{D87DEEFF-E651-D860-827B-CF0B1C3849AB}"/>
               </a:ext>
             </a:extLst>
           </p:cNvPr>
@@ -3714,7 +3714,7 @@
           <p:cNvPr id="4" name="テキスト ボックス 3">
             <a:extLst>
               <a:ext uri="{FF2B5EF4-FFF2-40B4-BE49-F238E27FC236}">
-                <a16:creationId xmlns:a16="http://schemas.microsoft.com/office/drawing/2014/main" id="{FA458C4E-5F18-8A6E-9820-10C4EB9AC3E9}"/>
+                <a16:creationId xmlns:a16="http://schemas.microsoft.com/office/drawing/2014/main" id="{A826E256-08E1-E2F6-0326-D2668030A874}"/>
               </a:ext>
             </a:extLst>
           </p:cNvPr>
@@ -3754,7 +3754,7 @@
           <p:cNvPr id="5" name="テキスト ボックス 4">
             <a:extLst>
               <a:ext uri="{FF2B5EF4-FFF2-40B4-BE49-F238E27FC236}">
-                <a16:creationId xmlns:a16="http://schemas.microsoft.com/office/drawing/2014/main" id="{BEF193DC-F3C3-CD7C-409B-F0FB6545B729}"/>
+                <a16:creationId xmlns:a16="http://schemas.microsoft.com/office/drawing/2014/main" id="{70DA0A92-0364-E29B-445D-CDF60AA2E0C8}"/>
               </a:ext>
             </a:extLst>
           </p:cNvPr>
@@ -3801,7 +3801,7 @@
             <a:hlinkClick r:id="" action="ppaction://media"/>
             <a:extLst>
               <a:ext uri="{FF2B5EF4-FFF2-40B4-BE49-F238E27FC236}">
-                <a16:creationId xmlns:a16="http://schemas.microsoft.com/office/drawing/2014/main" id="{D4EA78F4-B4E3-3EFE-09D9-5D7AE0E23E08}"/>
+                <a16:creationId xmlns:a16="http://schemas.microsoft.com/office/drawing/2014/main" id="{85F7B64E-70C1-1A9B-7390-428C5EE21D90}"/>
               </a:ext>
             </a:extLst>
           </p:cNvPr>
@@ -3836,7 +3836,7 @@
     </p:spTree>
     <p:extLst>
       <p:ext uri="{BB962C8B-B14F-4D97-AF65-F5344CB8AC3E}">
-        <p14:creationId xmlns:p14="http://schemas.microsoft.com/office/powerpoint/2010/main" val="2729650945"/>
+        <p14:creationId xmlns:p14="http://schemas.microsoft.com/office/powerpoint/2010/main" val="1017957732"/>
       </p:ext>
     </p:extLst>
   </p:cSld>
@@ -3960,7 +3960,7 @@
           <p:cNvPr id="2" name="テキスト ボックス 1">
             <a:extLst>
               <a:ext uri="{FF2B5EF4-FFF2-40B4-BE49-F238E27FC236}">
-                <a16:creationId xmlns:a16="http://schemas.microsoft.com/office/drawing/2014/main" id="{D42300C4-921A-4CD6-D103-299F5E1CE95F}"/>
+                <a16:creationId xmlns:a16="http://schemas.microsoft.com/office/drawing/2014/main" id="{D49CC739-A195-FDE5-FD47-97719D6CEAE1}"/>
               </a:ext>
             </a:extLst>
           </p:cNvPr>
@@ -4006,7 +4006,7 @@
           <p:cNvPr id="3" name="テキスト ボックス 2">
             <a:extLst>
               <a:ext uri="{FF2B5EF4-FFF2-40B4-BE49-F238E27FC236}">
-                <a16:creationId xmlns:a16="http://schemas.microsoft.com/office/drawing/2014/main" id="{2DCF0636-6D40-AFF2-38FC-8CD8C595994A}"/>
+                <a16:creationId xmlns:a16="http://schemas.microsoft.com/office/drawing/2014/main" id="{772995C4-D181-A385-D71E-92D89319B5FB}"/>
               </a:ext>
             </a:extLst>
           </p:cNvPr>
@@ -4046,7 +4046,7 @@
           <p:cNvPr id="4" name="テキスト ボックス 3">
             <a:extLst>
               <a:ext uri="{FF2B5EF4-FFF2-40B4-BE49-F238E27FC236}">
-                <a16:creationId xmlns:a16="http://schemas.microsoft.com/office/drawing/2014/main" id="{559CCEAB-C833-7979-0EC3-813EDDB6E5E2}"/>
+                <a16:creationId xmlns:a16="http://schemas.microsoft.com/office/drawing/2014/main" id="{68F8ACDD-F587-1147-F40E-A7FBA197D8E6}"/>
               </a:ext>
             </a:extLst>
           </p:cNvPr>
@@ -4095,7 +4095,7 @@
           <p:cNvPr id="5" name="テキスト ボックス 4">
             <a:extLst>
               <a:ext uri="{FF2B5EF4-FFF2-40B4-BE49-F238E27FC236}">
-                <a16:creationId xmlns:a16="http://schemas.microsoft.com/office/drawing/2014/main" id="{D874496C-9341-8A42-0309-3B5F19595A2F}"/>
+                <a16:creationId xmlns:a16="http://schemas.microsoft.com/office/drawing/2014/main" id="{DBF4F42F-C664-8981-A8BA-41919A577FDF}"/>
               </a:ext>
             </a:extLst>
           </p:cNvPr>
@@ -4142,7 +4142,7 @@
             <a:hlinkClick r:id="" action="ppaction://media"/>
             <a:extLst>
               <a:ext uri="{FF2B5EF4-FFF2-40B4-BE49-F238E27FC236}">
-                <a16:creationId xmlns:a16="http://schemas.microsoft.com/office/drawing/2014/main" id="{FB268000-2CFC-2857-B1B1-9B6B533389D4}"/>
+                <a16:creationId xmlns:a16="http://schemas.microsoft.com/office/drawing/2014/main" id="{1D8DCA9F-CFB5-69EC-C7E2-1DFDD7823015}"/>
               </a:ext>
             </a:extLst>
           </p:cNvPr>
@@ -4177,7 +4177,7 @@
     </p:spTree>
     <p:extLst>
       <p:ext uri="{BB962C8B-B14F-4D97-AF65-F5344CB8AC3E}">
-        <p14:creationId xmlns:p14="http://schemas.microsoft.com/office/powerpoint/2010/main" val="706168695"/>
+        <p14:creationId xmlns:p14="http://schemas.microsoft.com/office/powerpoint/2010/main" val="4282442550"/>
       </p:ext>
     </p:extLst>
   </p:cSld>
@@ -4301,7 +4301,7 @@
           <p:cNvPr id="2" name="テキスト ボックス 1">
             <a:extLst>
               <a:ext uri="{FF2B5EF4-FFF2-40B4-BE49-F238E27FC236}">
-                <a16:creationId xmlns:a16="http://schemas.microsoft.com/office/drawing/2014/main" id="{F398E143-FFA2-A700-CB67-85F4610495E2}"/>
+                <a16:creationId xmlns:a16="http://schemas.microsoft.com/office/drawing/2014/main" id="{A977E583-9D35-F101-5285-2812DB80DF24}"/>
               </a:ext>
             </a:extLst>
           </p:cNvPr>
@@ -4347,7 +4347,7 @@
           <p:cNvPr id="3" name="テキスト ボックス 2">
             <a:extLst>
               <a:ext uri="{FF2B5EF4-FFF2-40B4-BE49-F238E27FC236}">
-                <a16:creationId xmlns:a16="http://schemas.microsoft.com/office/drawing/2014/main" id="{FF1B8739-7342-1F40-65E2-C31E95CCC758}"/>
+                <a16:creationId xmlns:a16="http://schemas.microsoft.com/office/drawing/2014/main" id="{151E3458-D375-0976-6467-3B2E3EE6F59A}"/>
               </a:ext>
             </a:extLst>
           </p:cNvPr>
@@ -4387,7 +4387,7 @@
           <p:cNvPr id="4" name="テキスト ボックス 3">
             <a:extLst>
               <a:ext uri="{FF2B5EF4-FFF2-40B4-BE49-F238E27FC236}">
-                <a16:creationId xmlns:a16="http://schemas.microsoft.com/office/drawing/2014/main" id="{E27C692F-59D8-4D96-8C13-359B447AA031}"/>
+                <a16:creationId xmlns:a16="http://schemas.microsoft.com/office/drawing/2014/main" id="{E9B885A2-A4C4-6988-1545-48FD455EC40F}"/>
               </a:ext>
             </a:extLst>
           </p:cNvPr>
@@ -4428,7 +4428,7 @@
           <p:cNvPr id="5" name="テキスト ボックス 4">
             <a:extLst>
               <a:ext uri="{FF2B5EF4-FFF2-40B4-BE49-F238E27FC236}">
-                <a16:creationId xmlns:a16="http://schemas.microsoft.com/office/drawing/2014/main" id="{37841A6C-2BB9-1B6E-9845-40016405563A}"/>
+                <a16:creationId xmlns:a16="http://schemas.microsoft.com/office/drawing/2014/main" id="{6B186722-2208-A68F-52BF-1F87488DA88F}"/>
               </a:ext>
             </a:extLst>
           </p:cNvPr>
@@ -4475,7 +4475,7 @@
             <a:hlinkClick r:id="" action="ppaction://media"/>
             <a:extLst>
               <a:ext uri="{FF2B5EF4-FFF2-40B4-BE49-F238E27FC236}">
-                <a16:creationId xmlns:a16="http://schemas.microsoft.com/office/drawing/2014/main" id="{98116BBB-F692-EDDB-8064-31237B9EC6C3}"/>
+                <a16:creationId xmlns:a16="http://schemas.microsoft.com/office/drawing/2014/main" id="{1F08274C-77B0-A857-35C6-20620FB15606}"/>
               </a:ext>
             </a:extLst>
           </p:cNvPr>
@@ -4510,7 +4510,7 @@
     </p:spTree>
     <p:extLst>
       <p:ext uri="{BB962C8B-B14F-4D97-AF65-F5344CB8AC3E}">
-        <p14:creationId xmlns:p14="http://schemas.microsoft.com/office/powerpoint/2010/main" val="3444221396"/>
+        <p14:creationId xmlns:p14="http://schemas.microsoft.com/office/powerpoint/2010/main" val="2218016200"/>
       </p:ext>
     </p:extLst>
   </p:cSld>
@@ -4634,7 +4634,7 @@
           <p:cNvPr id="2" name="テキスト ボックス 1">
             <a:extLst>
               <a:ext uri="{FF2B5EF4-FFF2-40B4-BE49-F238E27FC236}">
-                <a16:creationId xmlns:a16="http://schemas.microsoft.com/office/drawing/2014/main" id="{5DC18DCC-0B9A-8C2A-6DCC-23832E85819C}"/>
+                <a16:creationId xmlns:a16="http://schemas.microsoft.com/office/drawing/2014/main" id="{61FC0A2F-3E44-A292-3F5D-25D09DB2D566}"/>
               </a:ext>
             </a:extLst>
           </p:cNvPr>
@@ -4680,7 +4680,7 @@
           <p:cNvPr id="3" name="テキスト ボックス 2">
             <a:extLst>
               <a:ext uri="{FF2B5EF4-FFF2-40B4-BE49-F238E27FC236}">
-                <a16:creationId xmlns:a16="http://schemas.microsoft.com/office/drawing/2014/main" id="{70AA6D75-6702-8421-919A-E15B49EE1FAD}"/>
+                <a16:creationId xmlns:a16="http://schemas.microsoft.com/office/drawing/2014/main" id="{26932409-FE59-DF17-2A34-3CAAA9DD867C}"/>
               </a:ext>
             </a:extLst>
           </p:cNvPr>
@@ -4720,7 +4720,7 @@
           <p:cNvPr id="4" name="テキスト ボックス 3">
             <a:extLst>
               <a:ext uri="{FF2B5EF4-FFF2-40B4-BE49-F238E27FC236}">
-                <a16:creationId xmlns:a16="http://schemas.microsoft.com/office/drawing/2014/main" id="{5F4CC8BE-EFFB-799A-4F8D-232AD05F9D2B}"/>
+                <a16:creationId xmlns:a16="http://schemas.microsoft.com/office/drawing/2014/main" id="{042E2EDB-1F98-72B7-78F2-0227DB7631C4}"/>
               </a:ext>
             </a:extLst>
           </p:cNvPr>
@@ -4779,7 +4779,7 @@
           <p:cNvPr id="5" name="テキスト ボックス 4">
             <a:extLst>
               <a:ext uri="{FF2B5EF4-FFF2-40B4-BE49-F238E27FC236}">
-                <a16:creationId xmlns:a16="http://schemas.microsoft.com/office/drawing/2014/main" id="{382EAC6D-D452-06D3-B4FB-2C47AD0D4E2B}"/>
+                <a16:creationId xmlns:a16="http://schemas.microsoft.com/office/drawing/2014/main" id="{9457BAAB-9AD6-1360-3DAA-9C41C4623C21}"/>
               </a:ext>
             </a:extLst>
           </p:cNvPr>
@@ -4826,7 +4826,7 @@
             <a:hlinkClick r:id="" action="ppaction://media"/>
             <a:extLst>
               <a:ext uri="{FF2B5EF4-FFF2-40B4-BE49-F238E27FC236}">
-                <a16:creationId xmlns:a16="http://schemas.microsoft.com/office/drawing/2014/main" id="{0C2FB9B0-79D0-FE4F-AE9C-FD5254E41058}"/>
+                <a16:creationId xmlns:a16="http://schemas.microsoft.com/office/drawing/2014/main" id="{FB199110-3CFC-A432-8A72-56C3640D5B06}"/>
               </a:ext>
             </a:extLst>
           </p:cNvPr>
@@ -4861,7 +4861,7 @@
     </p:spTree>
     <p:extLst>
       <p:ext uri="{BB962C8B-B14F-4D97-AF65-F5344CB8AC3E}">
-        <p14:creationId xmlns:p14="http://schemas.microsoft.com/office/powerpoint/2010/main" val="3991020653"/>
+        <p14:creationId xmlns:p14="http://schemas.microsoft.com/office/powerpoint/2010/main" val="3144799970"/>
       </p:ext>
     </p:extLst>
   </p:cSld>
@@ -4985,7 +4985,7 @@
           <p:cNvPr id="2" name="テキスト ボックス 1">
             <a:extLst>
               <a:ext uri="{FF2B5EF4-FFF2-40B4-BE49-F238E27FC236}">
-                <a16:creationId xmlns:a16="http://schemas.microsoft.com/office/drawing/2014/main" id="{C3C6D892-492B-C5A4-6623-15C7623A1973}"/>
+                <a16:creationId xmlns:a16="http://schemas.microsoft.com/office/drawing/2014/main" id="{7DC969A5-2E7D-BDE5-20C9-AD1F183963E3}"/>
               </a:ext>
             </a:extLst>
           </p:cNvPr>
@@ -5031,7 +5031,7 @@
           <p:cNvPr id="3" name="テキスト ボックス 2">
             <a:extLst>
               <a:ext uri="{FF2B5EF4-FFF2-40B4-BE49-F238E27FC236}">
-                <a16:creationId xmlns:a16="http://schemas.microsoft.com/office/drawing/2014/main" id="{21CE1545-B0B1-68CD-A5AA-0F0855A5BC2F}"/>
+                <a16:creationId xmlns:a16="http://schemas.microsoft.com/office/drawing/2014/main" id="{4BAC2B44-3C76-641B-1681-0565D33C7B9E}"/>
               </a:ext>
             </a:extLst>
           </p:cNvPr>
@@ -5071,7 +5071,7 @@
           <p:cNvPr id="4" name="テキスト ボックス 3">
             <a:extLst>
               <a:ext uri="{FF2B5EF4-FFF2-40B4-BE49-F238E27FC236}">
-                <a16:creationId xmlns:a16="http://schemas.microsoft.com/office/drawing/2014/main" id="{3A2F9771-8E53-0FA1-3A98-DD85C5D3BB91}"/>
+                <a16:creationId xmlns:a16="http://schemas.microsoft.com/office/drawing/2014/main" id="{88BAC378-7ED1-2EF7-F14C-5299BFD4D717}"/>
               </a:ext>
             </a:extLst>
           </p:cNvPr>
@@ -5095,20 +5095,14 @@
           <a:lstStyle/>
           <a:p>
             <a:r>
-              <a:rPr kumimoji="1" lang="en-US" altLang="ja-JP" sz="2000">
+              <a:rPr kumimoji="1" lang="ja-JP" altLang="en-US" sz="2000">
                 <a:solidFill>
                   <a:srgbClr val="333333"/>
                 </a:solidFill>
                 <a:latin typeface="Arial" panose="020B0604020202020204" pitchFamily="34" charset="0"/>
               </a:rPr>
-              <a:t>Initialize repository</a:t>
-            </a:r>
-            <a:endParaRPr kumimoji="1" lang="ja-JP" altLang="en-US" sz="2000">
-              <a:solidFill>
-                <a:srgbClr val="333333"/>
-              </a:solidFill>
-              <a:latin typeface="Arial" panose="020B0604020202020204" pitchFamily="34" charset="0"/>
-            </a:endParaRPr>
+              <a:t>直近のコミットでは、プロジェクトの初期構成と開発基盤が整備されました。</a:t>
+            </a:r>
           </a:p>
         </p:txBody>
       </p:sp>
@@ -5117,7 +5111,7 @@
           <p:cNvPr id="5" name="テキスト ボックス 4">
             <a:extLst>
               <a:ext uri="{FF2B5EF4-FFF2-40B4-BE49-F238E27FC236}">
-                <a16:creationId xmlns:a16="http://schemas.microsoft.com/office/drawing/2014/main" id="{9076586A-5954-5DE1-0A8C-4CC30DF5A136}"/>
+                <a16:creationId xmlns:a16="http://schemas.microsoft.com/office/drawing/2014/main" id="{D65B4FF3-E758-844E-0A78-4E063AA6FBD5}"/>
               </a:ext>
             </a:extLst>
           </p:cNvPr>
@@ -5164,7 +5158,7 @@
             <a:hlinkClick r:id="" action="ppaction://media"/>
             <a:extLst>
               <a:ext uri="{FF2B5EF4-FFF2-40B4-BE49-F238E27FC236}">
-                <a16:creationId xmlns:a16="http://schemas.microsoft.com/office/drawing/2014/main" id="{51809A90-71CC-57FA-E579-47358CB36F1F}"/>
+                <a16:creationId xmlns:a16="http://schemas.microsoft.com/office/drawing/2014/main" id="{E78282DB-3603-5781-882B-15115CB0D323}"/>
               </a:ext>
             </a:extLst>
           </p:cNvPr>
@@ -5199,7 +5193,7 @@
     </p:spTree>
     <p:extLst>
       <p:ext uri="{BB962C8B-B14F-4D97-AF65-F5344CB8AC3E}">
-        <p14:creationId xmlns:p14="http://schemas.microsoft.com/office/powerpoint/2010/main" val="3884246024"/>
+        <p14:creationId xmlns:p14="http://schemas.microsoft.com/office/powerpoint/2010/main" val="3848814218"/>
       </p:ext>
     </p:extLst>
   </p:cSld>
@@ -5208,10 +5202,10 @@
   </p:clrMapOvr>
   <mc:AlternateContent xmlns:mc="http://schemas.openxmlformats.org/markup-compatibility/2006">
     <mc:Choice xmlns:p14="http://schemas.microsoft.com/office/powerpoint/2010/main" Requires="p14">
-      <p:transition spd="slow" p14:dur="2000" advTm="6000"/>
+      <p:transition spd="slow" p14:dur="2000" advTm="7000"/>
     </mc:Choice>
     <mc:Fallback>
-      <p:transition spd="slow" advTm="6000"/>
+      <p:transition spd="slow" advTm="7000"/>
     </mc:Fallback>
   </mc:AlternateContent>
   <p:timing>
@@ -5242,7 +5236,7 @@
                                   <p:childTnLst>
                                     <p:cmd type="call" cmd="playFrom(0.0)">
                                       <p:cBhvr>
-                                        <p:cTn id="6" dur="5687" fill="hold"/>
+                                        <p:cTn id="6" dur="6126" fill="hold"/>
                                         <p:tgtEl>
                                           <p:spTgt spid="6"/>
                                         </p:tgtEl>
@@ -5323,7 +5317,7 @@
           <p:cNvPr id="2" name="テキスト ボックス 1">
             <a:extLst>
               <a:ext uri="{FF2B5EF4-FFF2-40B4-BE49-F238E27FC236}">
-                <a16:creationId xmlns:a16="http://schemas.microsoft.com/office/drawing/2014/main" id="{5929BFEF-A8B6-CDAD-B8CF-8967C2A72D9F}"/>
+                <a16:creationId xmlns:a16="http://schemas.microsoft.com/office/drawing/2014/main" id="{DCD3C30B-710A-236A-273E-FD5E0F98BA55}"/>
               </a:ext>
             </a:extLst>
           </p:cNvPr>
@@ -5369,7 +5363,7 @@
           <p:cNvPr id="3" name="テキスト ボックス 2">
             <a:extLst>
               <a:ext uri="{FF2B5EF4-FFF2-40B4-BE49-F238E27FC236}">
-                <a16:creationId xmlns:a16="http://schemas.microsoft.com/office/drawing/2014/main" id="{FC109A48-5445-F9F0-6E80-6A1AA77D3BFE}"/>
+                <a16:creationId xmlns:a16="http://schemas.microsoft.com/office/drawing/2014/main" id="{56B44416-2181-2EFA-1866-D6D73A7476BC}"/>
               </a:ext>
             </a:extLst>
           </p:cNvPr>
@@ -5409,7 +5403,7 @@
           <p:cNvPr id="4" name="テキスト ボックス 3">
             <a:extLst>
               <a:ext uri="{FF2B5EF4-FFF2-40B4-BE49-F238E27FC236}">
-                <a16:creationId xmlns:a16="http://schemas.microsoft.com/office/drawing/2014/main" id="{D0CF71B2-6A66-6B12-F37B-321E72BE3F7C}"/>
+                <a16:creationId xmlns:a16="http://schemas.microsoft.com/office/drawing/2014/main" id="{558DDB61-E411-2445-79B5-A11FA99EB0F3}"/>
               </a:ext>
             </a:extLst>
           </p:cNvPr>
@@ -5474,7 +5468,7 @@
           <p:cNvPr id="5" name="テキスト ボックス 4">
             <a:extLst>
               <a:ext uri="{FF2B5EF4-FFF2-40B4-BE49-F238E27FC236}">
-                <a16:creationId xmlns:a16="http://schemas.microsoft.com/office/drawing/2014/main" id="{74D07017-3186-F9FF-0707-96A4C21647BA}"/>
+                <a16:creationId xmlns:a16="http://schemas.microsoft.com/office/drawing/2014/main" id="{189389FC-42EB-A687-20F3-476EF162C401}"/>
               </a:ext>
             </a:extLst>
           </p:cNvPr>
@@ -5521,7 +5515,7 @@
             <a:hlinkClick r:id="" action="ppaction://media"/>
             <a:extLst>
               <a:ext uri="{FF2B5EF4-FFF2-40B4-BE49-F238E27FC236}">
-                <a16:creationId xmlns:a16="http://schemas.microsoft.com/office/drawing/2014/main" id="{2D99E4CC-C2A1-BF85-96F4-7683FB3A0BB5}"/>
+                <a16:creationId xmlns:a16="http://schemas.microsoft.com/office/drawing/2014/main" id="{2917A0F4-DABE-C1F2-04E1-0A936E43B9E9}"/>
               </a:ext>
             </a:extLst>
           </p:cNvPr>
@@ -5556,7 +5550,7 @@
     </p:spTree>
     <p:extLst>
       <p:ext uri="{BB962C8B-B14F-4D97-AF65-F5344CB8AC3E}">
-        <p14:creationId xmlns:p14="http://schemas.microsoft.com/office/powerpoint/2010/main" val="2459404135"/>
+        <p14:creationId xmlns:p14="http://schemas.microsoft.com/office/powerpoint/2010/main" val="4129252779"/>
       </p:ext>
     </p:extLst>
   </p:cSld>
